--- a/week1 - Laravel Intro/M8Prog laravel 01 - Kickoff.pptx
+++ b/week1 - Laravel Intro/M8Prog laravel 01 - Kickoff.pptx
@@ -13,13 +13,12 @@
     <p:sldId id="267" r:id="rId7"/>
     <p:sldId id="268" r:id="rId8"/>
     <p:sldId id="269" r:id="rId9"/>
-    <p:sldId id="271" r:id="rId10"/>
-    <p:sldId id="272" r:id="rId11"/>
-    <p:sldId id="273" r:id="rId12"/>
-    <p:sldId id="275" r:id="rId13"/>
-    <p:sldId id="274" r:id="rId14"/>
-    <p:sldId id="276" r:id="rId15"/>
-    <p:sldId id="277" r:id="rId16"/>
+    <p:sldId id="272" r:id="rId10"/>
+    <p:sldId id="273" r:id="rId11"/>
+    <p:sldId id="275" r:id="rId12"/>
+    <p:sldId id="274" r:id="rId13"/>
+    <p:sldId id="276" r:id="rId14"/>
+    <p:sldId id="277" r:id="rId15"/>
   </p:sldIdLst>
   <p:sldSz cx="12192000" cy="6858000"/>
   <p:notesSz cx="6858000" cy="9144000"/>
@@ -129,7 +128,7 @@
 <file path=ppt/revisionInfo.xml><?xml version="1.0" encoding="utf-8"?>
 <p1510:revInfo xmlns:a="http://schemas.openxmlformats.org/drawingml/2006/main" xmlns:r="http://schemas.openxmlformats.org/officeDocument/2006/relationships" xmlns:p1510="http://schemas.microsoft.com/office/powerpoint/2015/10/main">
   <p1510:revLst>
-    <p1510:client id="{14E9EC92-9455-409F-A105-F6AAFA0F45B5}" v="15" dt="2026-04-20T14:22:28.442"/>
+    <p1510:client id="{8480E6ED-9360-4FC2-B127-D918C1499FC1}" v="2" dt="2026-05-07T09:58:14.726"/>
   </p1510:revLst>
 </p1510:revInfo>
 </file>
@@ -139,7 +138,7 @@
   <pc:docChgLst>
     <pc:chgData name="Dragan Javorac" userId="913c2858-fb97-4c6e-a42c-b1f1a16b225e" providerId="ADAL" clId="{BC00D9DF-F858-4149-8B7B-F211D448CEDA}"/>
     <pc:docChg chg="undo custSel addSld delSld modSld sldOrd">
-      <pc:chgData name="Dragan Javorac" userId="913c2858-fb97-4c6e-a42c-b1f1a16b225e" providerId="ADAL" clId="{BC00D9DF-F858-4149-8B7B-F211D448CEDA}" dt="2026-04-20T14:22:34.360" v="1443" actId="6549"/>
+      <pc:chgData name="Dragan Javorac" userId="913c2858-fb97-4c6e-a42c-b1f1a16b225e" providerId="ADAL" clId="{BC00D9DF-F858-4149-8B7B-F211D448CEDA}" dt="2026-05-07T09:58:55.926" v="1452" actId="14100"/>
       <pc:docMkLst>
         <pc:docMk/>
       </pc:docMkLst>
@@ -173,41 +172,6 @@
           </ac:spMkLst>
         </pc:spChg>
       </pc:sldChg>
-      <pc:sldChg chg="del">
-        <pc:chgData name="Dragan Javorac" userId="913c2858-fb97-4c6e-a42c-b1f1a16b225e" providerId="ADAL" clId="{BC00D9DF-F858-4149-8B7B-F211D448CEDA}" dt="2026-04-20T12:57:10.760" v="348" actId="47"/>
-        <pc:sldMkLst>
-          <pc:docMk/>
-          <pc:sldMk cId="2544943614" sldId="260"/>
-        </pc:sldMkLst>
-      </pc:sldChg>
-      <pc:sldChg chg="del">
-        <pc:chgData name="Dragan Javorac" userId="913c2858-fb97-4c6e-a42c-b1f1a16b225e" providerId="ADAL" clId="{BC00D9DF-F858-4149-8B7B-F211D448CEDA}" dt="2026-04-20T12:56:32.032" v="203" actId="47"/>
-        <pc:sldMkLst>
-          <pc:docMk/>
-          <pc:sldMk cId="1912488285" sldId="261"/>
-        </pc:sldMkLst>
-      </pc:sldChg>
-      <pc:sldChg chg="del">
-        <pc:chgData name="Dragan Javorac" userId="913c2858-fb97-4c6e-a42c-b1f1a16b225e" providerId="ADAL" clId="{BC00D9DF-F858-4149-8B7B-F211D448CEDA}" dt="2026-04-20T12:56:34.218" v="204" actId="47"/>
-        <pc:sldMkLst>
-          <pc:docMk/>
-          <pc:sldMk cId="975356081" sldId="262"/>
-        </pc:sldMkLst>
-      </pc:sldChg>
-      <pc:sldChg chg="del">
-        <pc:chgData name="Dragan Javorac" userId="913c2858-fb97-4c6e-a42c-b1f1a16b225e" providerId="ADAL" clId="{BC00D9DF-F858-4149-8B7B-F211D448CEDA}" dt="2026-04-20T12:56:36.310" v="205" actId="47"/>
-        <pc:sldMkLst>
-          <pc:docMk/>
-          <pc:sldMk cId="4077960106" sldId="263"/>
-        </pc:sldMkLst>
-      </pc:sldChg>
-      <pc:sldChg chg="del">
-        <pc:chgData name="Dragan Javorac" userId="913c2858-fb97-4c6e-a42c-b1f1a16b225e" providerId="ADAL" clId="{BC00D9DF-F858-4149-8B7B-F211D448CEDA}" dt="2026-04-20T12:57:12.621" v="349" actId="47"/>
-        <pc:sldMkLst>
-          <pc:docMk/>
-          <pc:sldMk cId="3464282836" sldId="264"/>
-        </pc:sldMkLst>
-      </pc:sldChg>
       <pc:sldChg chg="add">
         <pc:chgData name="Dragan Javorac" userId="913c2858-fb97-4c6e-a42c-b1f1a16b225e" providerId="ADAL" clId="{BC00D9DF-F858-4149-8B7B-F211D448CEDA}" dt="2026-04-20T13:58:14.417" v="1312"/>
         <pc:sldMkLst>
@@ -229,13 +193,6 @@
             <ac:spMk id="3" creationId="{571FF7F4-F7D8-791A-E7A2-624CB2211E15}"/>
           </ac:spMkLst>
         </pc:spChg>
-      </pc:sldChg>
-      <pc:sldChg chg="add del">
-        <pc:chgData name="Dragan Javorac" userId="913c2858-fb97-4c6e-a42c-b1f1a16b225e" providerId="ADAL" clId="{BC00D9DF-F858-4149-8B7B-F211D448CEDA}" dt="2026-04-20T13:58:07.490" v="1311" actId="47"/>
-        <pc:sldMkLst>
-          <pc:docMk/>
-          <pc:sldMk cId="1200380372" sldId="266"/>
-        </pc:sldMkLst>
       </pc:sldChg>
       <pc:sldChg chg="addSp delSp modSp add mod">
         <pc:chgData name="Dragan Javorac" userId="913c2858-fb97-4c6e-a42c-b1f1a16b225e" providerId="ADAL" clId="{BC00D9DF-F858-4149-8B7B-F211D448CEDA}" dt="2026-04-20T13:00:29.687" v="636" actId="20577"/>
@@ -259,14 +216,6 @@
             <ac:spMk id="3" creationId="{E3C05911-ACB3-D21B-ABF1-C7734711DCF0}"/>
           </ac:spMkLst>
         </pc:spChg>
-        <pc:picChg chg="add del mod">
-          <ac:chgData name="Dragan Javorac" userId="913c2858-fb97-4c6e-a42c-b1f1a16b225e" providerId="ADAL" clId="{BC00D9DF-F858-4149-8B7B-F211D448CEDA}" dt="2026-04-20T12:59:42.065" v="478" actId="478"/>
-          <ac:picMkLst>
-            <pc:docMk/>
-            <pc:sldMk cId="1127631716" sldId="267"/>
-            <ac:picMk id="5" creationId="{7C89EBBD-6BF4-6B6C-BE06-817EAE1D1421}"/>
-          </ac:picMkLst>
-        </pc:picChg>
         <pc:picChg chg="add mod">
           <ac:chgData name="Dragan Javorac" userId="913c2858-fb97-4c6e-a42c-b1f1a16b225e" providerId="ADAL" clId="{BC00D9DF-F858-4149-8B7B-F211D448CEDA}" dt="2026-04-20T12:59:49.769" v="483" actId="1076"/>
           <ac:picMkLst>
@@ -298,14 +247,6 @@
             <ac:spMk id="3" creationId="{1213AA78-2526-017B-9164-6030F596CD02}"/>
           </ac:spMkLst>
         </pc:spChg>
-        <pc:picChg chg="del">
-          <ac:chgData name="Dragan Javorac" userId="913c2858-fb97-4c6e-a42c-b1f1a16b225e" providerId="ADAL" clId="{BC00D9DF-F858-4149-8B7B-F211D448CEDA}" dt="2026-04-20T13:03:07.335" v="715" actId="478"/>
-          <ac:picMkLst>
-            <pc:docMk/>
-            <pc:sldMk cId="2522837330" sldId="268"/>
-            <ac:picMk id="7" creationId="{720E0721-E4A6-70CE-BAD2-C8BEA401BF8A}"/>
-          </ac:picMkLst>
-        </pc:picChg>
       </pc:sldChg>
       <pc:sldChg chg="addSp delSp modSp add mod">
         <pc:chgData name="Dragan Javorac" userId="913c2858-fb97-4c6e-a42c-b1f1a16b225e" providerId="ADAL" clId="{BC00D9DF-F858-4149-8B7B-F211D448CEDA}" dt="2026-04-20T13:02:53.433" v="659" actId="1076"/>
@@ -313,38 +254,6 @@
           <pc:docMk/>
           <pc:sldMk cId="780809917" sldId="269"/>
         </pc:sldMkLst>
-        <pc:spChg chg="del">
-          <ac:chgData name="Dragan Javorac" userId="913c2858-fb97-4c6e-a42c-b1f1a16b225e" providerId="ADAL" clId="{BC00D9DF-F858-4149-8B7B-F211D448CEDA}" dt="2026-04-20T13:02:47.425" v="654" actId="478"/>
-          <ac:spMkLst>
-            <pc:docMk/>
-            <pc:sldMk cId="780809917" sldId="269"/>
-            <ac:spMk id="2" creationId="{93107AE6-58F5-2E07-5E96-F753985A3AF4}"/>
-          </ac:spMkLst>
-        </pc:spChg>
-        <pc:spChg chg="del mod">
-          <ac:chgData name="Dragan Javorac" userId="913c2858-fb97-4c6e-a42c-b1f1a16b225e" providerId="ADAL" clId="{BC00D9DF-F858-4149-8B7B-F211D448CEDA}" dt="2026-04-20T13:02:45.522" v="653" actId="478"/>
-          <ac:spMkLst>
-            <pc:docMk/>
-            <pc:sldMk cId="780809917" sldId="269"/>
-            <ac:spMk id="3" creationId="{EF1B9D82-0A31-205D-854C-E9408B5D9670}"/>
-          </ac:spMkLst>
-        </pc:spChg>
-        <pc:spChg chg="add del mod">
-          <ac:chgData name="Dragan Javorac" userId="913c2858-fb97-4c6e-a42c-b1f1a16b225e" providerId="ADAL" clId="{BC00D9DF-F858-4149-8B7B-F211D448CEDA}" dt="2026-04-20T13:02:48.625" v="656" actId="478"/>
-          <ac:spMkLst>
-            <pc:docMk/>
-            <pc:sldMk cId="780809917" sldId="269"/>
-            <ac:spMk id="8" creationId="{7E320E43-358D-0B9B-47E7-804E144614DF}"/>
-          </ac:spMkLst>
-        </pc:spChg>
-        <pc:spChg chg="add del mod">
-          <ac:chgData name="Dragan Javorac" userId="913c2858-fb97-4c6e-a42c-b1f1a16b225e" providerId="ADAL" clId="{BC00D9DF-F858-4149-8B7B-F211D448CEDA}" dt="2026-04-20T13:02:48.025" v="655" actId="478"/>
-          <ac:spMkLst>
-            <pc:docMk/>
-            <pc:sldMk cId="780809917" sldId="269"/>
-            <ac:spMk id="10" creationId="{C200BB0F-26E6-CE17-062D-3CEFBA3BC601}"/>
-          </ac:spMkLst>
-        </pc:spChg>
         <pc:picChg chg="add mod">
           <ac:chgData name="Dragan Javorac" userId="913c2858-fb97-4c6e-a42c-b1f1a16b225e" providerId="ADAL" clId="{BC00D9DF-F858-4149-8B7B-F211D448CEDA}" dt="2026-04-20T13:02:53.433" v="659" actId="1076"/>
           <ac:picMkLst>
@@ -353,24 +262,9 @@
             <ac:picMk id="5" creationId="{BAC3E76A-0EA3-5951-5885-632F43C5F7DE}"/>
           </ac:picMkLst>
         </pc:picChg>
-        <pc:picChg chg="del">
-          <ac:chgData name="Dragan Javorac" userId="913c2858-fb97-4c6e-a42c-b1f1a16b225e" providerId="ADAL" clId="{BC00D9DF-F858-4149-8B7B-F211D448CEDA}" dt="2026-04-20T13:02:41.990" v="650" actId="478"/>
-          <ac:picMkLst>
-            <pc:docMk/>
-            <pc:sldMk cId="780809917" sldId="269"/>
-            <ac:picMk id="7" creationId="{515751B0-B273-ED8E-9F9A-F6A932E931D0}"/>
-          </ac:picMkLst>
-        </pc:picChg>
       </pc:sldChg>
       <pc:sldChg chg="add del">
-        <pc:chgData name="Dragan Javorac" userId="913c2858-fb97-4c6e-a42c-b1f1a16b225e" providerId="ADAL" clId="{BC00D9DF-F858-4149-8B7B-F211D448CEDA}" dt="2026-04-20T13:05:22.560" v="868" actId="47"/>
-        <pc:sldMkLst>
-          <pc:docMk/>
-          <pc:sldMk cId="2892141780" sldId="270"/>
-        </pc:sldMkLst>
-      </pc:sldChg>
-      <pc:sldChg chg="add">
-        <pc:chgData name="Dragan Javorac" userId="913c2858-fb97-4c6e-a42c-b1f1a16b225e" providerId="ADAL" clId="{BC00D9DF-F858-4149-8B7B-F211D448CEDA}" dt="2026-04-20T13:05:21.437" v="867"/>
+        <pc:chgData name="Dragan Javorac" userId="913c2858-fb97-4c6e-a42c-b1f1a16b225e" providerId="ADAL" clId="{BC00D9DF-F858-4149-8B7B-F211D448CEDA}" dt="2026-05-07T09:56:50.655" v="1444" actId="47"/>
         <pc:sldMkLst>
           <pc:docMk/>
           <pc:sldMk cId="2729798725" sldId="271"/>
@@ -421,30 +315,6 @@
             <ac:spMk id="3" creationId="{F616954B-38AF-4F93-C8D6-513BE0D427F5}"/>
           </ac:spMkLst>
         </pc:spChg>
-        <pc:picChg chg="add del mod">
-          <ac:chgData name="Dragan Javorac" userId="913c2858-fb97-4c6e-a42c-b1f1a16b225e" providerId="ADAL" clId="{BC00D9DF-F858-4149-8B7B-F211D448CEDA}" dt="2026-04-20T13:15:45.727" v="1156" actId="478"/>
-          <ac:picMkLst>
-            <pc:docMk/>
-            <pc:sldMk cId="3647795254" sldId="273"/>
-            <ac:picMk id="5" creationId="{056B0569-27A5-3438-2D4D-DE00EED33B4B}"/>
-          </ac:picMkLst>
-        </pc:picChg>
-        <pc:picChg chg="add del">
-          <ac:chgData name="Dragan Javorac" userId="913c2858-fb97-4c6e-a42c-b1f1a16b225e" providerId="ADAL" clId="{BC00D9DF-F858-4149-8B7B-F211D448CEDA}" dt="2026-04-20T13:15:44.947" v="1153" actId="478"/>
-          <ac:picMkLst>
-            <pc:docMk/>
-            <pc:sldMk cId="3647795254" sldId="273"/>
-            <ac:picMk id="7" creationId="{FA201E2E-840E-566F-6699-59E00D48FB73}"/>
-          </ac:picMkLst>
-        </pc:picChg>
-        <pc:picChg chg="add del mod">
-          <ac:chgData name="Dragan Javorac" userId="913c2858-fb97-4c6e-a42c-b1f1a16b225e" providerId="ADAL" clId="{BC00D9DF-F858-4149-8B7B-F211D448CEDA}" dt="2026-04-20T13:15:45.325" v="1155" actId="478"/>
-          <ac:picMkLst>
-            <pc:docMk/>
-            <pc:sldMk cId="3647795254" sldId="273"/>
-            <ac:picMk id="9" creationId="{F71C984D-4864-150D-9104-F49260590AF7}"/>
-          </ac:picMkLst>
-        </pc:picChg>
         <pc:picChg chg="add mod modCrop">
           <ac:chgData name="Dragan Javorac" userId="913c2858-fb97-4c6e-a42c-b1f1a16b225e" providerId="ADAL" clId="{BC00D9DF-F858-4149-8B7B-F211D448CEDA}" dt="2026-04-20T13:16:04.632" v="1167" actId="1076"/>
           <ac:picMkLst>
@@ -500,14 +370,6 @@
             <ac:picMk id="9" creationId="{00312B97-5CC5-46E7-127E-A496404F2988}"/>
           </ac:picMkLst>
         </pc:picChg>
-        <pc:picChg chg="del">
-          <ac:chgData name="Dragan Javorac" userId="913c2858-fb97-4c6e-a42c-b1f1a16b225e" providerId="ADAL" clId="{BC00D9DF-F858-4149-8B7B-F211D448CEDA}" dt="2026-04-20T13:16:16.363" v="1180" actId="478"/>
-          <ac:picMkLst>
-            <pc:docMk/>
-            <pc:sldMk cId="890829217" sldId="274"/>
-            <ac:picMk id="11" creationId="{29BE1B00-1AC4-C8B1-CF01-7CD50F7B967C}"/>
-          </ac:picMkLst>
-        </pc:picChg>
       </pc:sldChg>
       <pc:sldChg chg="addSp delSp modSp add mod">
         <pc:chgData name="Dragan Javorac" userId="913c2858-fb97-4c6e-a42c-b1f1a16b225e" providerId="ADAL" clId="{BC00D9DF-F858-4149-8B7B-F211D448CEDA}" dt="2026-04-20T13:17:14.665" v="1267" actId="1076"/>
@@ -539,22 +401,6 @@
             <ac:picMk id="5" creationId="{736541C1-5400-65F3-A1B1-8301B27E885C}"/>
           </ac:picMkLst>
         </pc:picChg>
-        <pc:picChg chg="del">
-          <ac:chgData name="Dragan Javorac" userId="913c2858-fb97-4c6e-a42c-b1f1a16b225e" providerId="ADAL" clId="{BC00D9DF-F858-4149-8B7B-F211D448CEDA}" dt="2026-04-20T13:16:44.534" v="1184" actId="478"/>
-          <ac:picMkLst>
-            <pc:docMk/>
-            <pc:sldMk cId="3990401276" sldId="275"/>
-            <ac:picMk id="11" creationId="{29D0F6DB-969D-0259-368D-455438E464B4}"/>
-          </ac:picMkLst>
-        </pc:picChg>
-        <pc:picChg chg="del">
-          <ac:chgData name="Dragan Javorac" userId="913c2858-fb97-4c6e-a42c-b1f1a16b225e" providerId="ADAL" clId="{BC00D9DF-F858-4149-8B7B-F211D448CEDA}" dt="2026-04-20T13:16:44.534" v="1184" actId="478"/>
-          <ac:picMkLst>
-            <pc:docMk/>
-            <pc:sldMk cId="3990401276" sldId="275"/>
-            <ac:picMk id="13" creationId="{802433AF-EAB2-279A-AB64-125435D005C5}"/>
-          </ac:picMkLst>
-        </pc:picChg>
       </pc:sldChg>
       <pc:sldChg chg="addSp delSp modSp add mod">
         <pc:chgData name="Dragan Javorac" userId="913c2858-fb97-4c6e-a42c-b1f1a16b225e" providerId="ADAL" clId="{BC00D9DF-F858-4149-8B7B-F211D448CEDA}" dt="2026-04-20T13:18:38.516" v="1309" actId="1076"/>
@@ -570,28 +416,12 @@
             <ac:spMk id="3" creationId="{E0E8185D-417F-C485-EB41-C5E76E494451}"/>
           </ac:spMkLst>
         </pc:spChg>
-        <pc:picChg chg="del">
-          <ac:chgData name="Dragan Javorac" userId="913c2858-fb97-4c6e-a42c-b1f1a16b225e" providerId="ADAL" clId="{BC00D9DF-F858-4149-8B7B-F211D448CEDA}" dt="2026-04-20T13:18:00.061" v="1283" actId="478"/>
-          <ac:picMkLst>
-            <pc:docMk/>
-            <pc:sldMk cId="3138344833" sldId="276"/>
-            <ac:picMk id="5" creationId="{60C7CA54-9C9B-7FD2-A003-DFF72B760889}"/>
-          </ac:picMkLst>
-        </pc:picChg>
         <pc:picChg chg="add mod">
           <ac:chgData name="Dragan Javorac" userId="913c2858-fb97-4c6e-a42c-b1f1a16b225e" providerId="ADAL" clId="{BC00D9DF-F858-4149-8B7B-F211D448CEDA}" dt="2026-04-20T13:18:36.904" v="1308" actId="1076"/>
           <ac:picMkLst>
             <pc:docMk/>
             <pc:sldMk cId="3138344833" sldId="276"/>
             <ac:picMk id="6" creationId="{62D0E468-14F8-F6EB-A104-2059916E4993}"/>
-          </ac:picMkLst>
-        </pc:picChg>
-        <pc:picChg chg="del mod">
-          <ac:chgData name="Dragan Javorac" userId="913c2858-fb97-4c6e-a42c-b1f1a16b225e" providerId="ADAL" clId="{BC00D9DF-F858-4149-8B7B-F211D448CEDA}" dt="2026-04-20T13:18:21.769" v="1300" actId="478"/>
-          <ac:picMkLst>
-            <pc:docMk/>
-            <pc:sldMk cId="3138344833" sldId="276"/>
-            <ac:picMk id="7" creationId="{429F6330-C3D5-A348-9D94-F19B9E841F0D}"/>
           </ac:picMkLst>
         </pc:picChg>
         <pc:picChg chg="mod">
@@ -612,7 +442,7 @@
         </pc:picChg>
       </pc:sldChg>
       <pc:sldChg chg="addSp delSp modSp add mod">
-        <pc:chgData name="Dragan Javorac" userId="913c2858-fb97-4c6e-a42c-b1f1a16b225e" providerId="ADAL" clId="{BC00D9DF-F858-4149-8B7B-F211D448CEDA}" dt="2026-04-20T14:22:34.360" v="1443" actId="6549"/>
+        <pc:chgData name="Dragan Javorac" userId="913c2858-fb97-4c6e-a42c-b1f1a16b225e" providerId="ADAL" clId="{BC00D9DF-F858-4149-8B7B-F211D448CEDA}" dt="2026-05-07T09:58:55.926" v="1452" actId="14100"/>
         <pc:sldMkLst>
           <pc:docMk/>
           <pc:sldMk cId="1039330640" sldId="277"/>
@@ -626,23 +456,23 @@
           </ac:spMkLst>
         </pc:spChg>
         <pc:spChg chg="mod">
-          <ac:chgData name="Dragan Javorac" userId="913c2858-fb97-4c6e-a42c-b1f1a16b225e" providerId="ADAL" clId="{BC00D9DF-F858-4149-8B7B-F211D448CEDA}" dt="2026-04-20T14:22:34.360" v="1443" actId="6549"/>
+          <ac:chgData name="Dragan Javorac" userId="913c2858-fb97-4c6e-a42c-b1f1a16b225e" providerId="ADAL" clId="{BC00D9DF-F858-4149-8B7B-F211D448CEDA}" dt="2026-05-07T09:58:14.702" v="1448" actId="20577"/>
           <ac:spMkLst>
             <pc:docMk/>
             <pc:sldMk cId="1039330640" sldId="277"/>
             <ac:spMk id="3" creationId="{6D2639E8-D6B9-2C26-7E9C-B98B2FFAD52C}"/>
           </ac:spMkLst>
         </pc:spChg>
-        <pc:picChg chg="add del mod">
-          <ac:chgData name="Dragan Javorac" userId="913c2858-fb97-4c6e-a42c-b1f1a16b225e" providerId="ADAL" clId="{BC00D9DF-F858-4149-8B7B-F211D448CEDA}" dt="2026-04-20T14:22:15.650" v="1429" actId="478"/>
+        <pc:picChg chg="add mod">
+          <ac:chgData name="Dragan Javorac" userId="913c2858-fb97-4c6e-a42c-b1f1a16b225e" providerId="ADAL" clId="{BC00D9DF-F858-4149-8B7B-F211D448CEDA}" dt="2026-05-07T09:58:55.926" v="1452" actId="14100"/>
           <ac:picMkLst>
             <pc:docMk/>
             <pc:sldMk cId="1039330640" sldId="277"/>
-            <ac:picMk id="5" creationId="{174D50F0-EF86-314A-EBAC-51F1C61F23E2}"/>
+            <ac:picMk id="5" creationId="{2B35C14B-EE40-E53C-DCF2-153E05F710B9}"/>
           </ac:picMkLst>
         </pc:picChg>
-        <pc:picChg chg="add mod">
-          <ac:chgData name="Dragan Javorac" userId="913c2858-fb97-4c6e-a42c-b1f1a16b225e" providerId="ADAL" clId="{BC00D9DF-F858-4149-8B7B-F211D448CEDA}" dt="2026-04-20T14:22:32.172" v="1441" actId="1076"/>
+        <pc:picChg chg="add del mod">
+          <ac:chgData name="Dragan Javorac" userId="913c2858-fb97-4c6e-a42c-b1f1a16b225e" providerId="ADAL" clId="{BC00D9DF-F858-4149-8B7B-F211D448CEDA}" dt="2026-05-07T09:58:52.250" v="1449" actId="478"/>
           <ac:picMkLst>
             <pc:docMk/>
             <pc:sldMk cId="1039330640" sldId="277"/>
@@ -804,7 +634,7 @@
           <a:p>
             <a:fld id="{AD36792F-A28E-4983-A7F5-F40ED51D6004}" type="datetimeFigureOut">
               <a:rPr lang="nl-NL" smtClean="0"/>
-              <a:t>20-4-2026</a:t>
+              <a:t>7-5-2026</a:t>
             </a:fld>
             <a:endParaRPr lang="nl-NL"/>
           </a:p>
@@ -1004,7 +834,7 @@
           <a:p>
             <a:fld id="{AD36792F-A28E-4983-A7F5-F40ED51D6004}" type="datetimeFigureOut">
               <a:rPr lang="nl-NL" smtClean="0"/>
-              <a:t>20-4-2026</a:t>
+              <a:t>7-5-2026</a:t>
             </a:fld>
             <a:endParaRPr lang="nl-NL"/>
           </a:p>
@@ -1214,7 +1044,7 @@
           <a:p>
             <a:fld id="{AD36792F-A28E-4983-A7F5-F40ED51D6004}" type="datetimeFigureOut">
               <a:rPr lang="nl-NL" smtClean="0"/>
-              <a:t>20-4-2026</a:t>
+              <a:t>7-5-2026</a:t>
             </a:fld>
             <a:endParaRPr lang="nl-NL"/>
           </a:p>
@@ -1414,7 +1244,7 @@
           <a:p>
             <a:fld id="{AD36792F-A28E-4983-A7F5-F40ED51D6004}" type="datetimeFigureOut">
               <a:rPr lang="nl-NL" smtClean="0"/>
-              <a:t>20-4-2026</a:t>
+              <a:t>7-5-2026</a:t>
             </a:fld>
             <a:endParaRPr lang="nl-NL"/>
           </a:p>
@@ -1690,7 +1520,7 @@
           <a:p>
             <a:fld id="{AD36792F-A28E-4983-A7F5-F40ED51D6004}" type="datetimeFigureOut">
               <a:rPr lang="nl-NL" smtClean="0"/>
-              <a:t>20-4-2026</a:t>
+              <a:t>7-5-2026</a:t>
             </a:fld>
             <a:endParaRPr lang="nl-NL"/>
           </a:p>
@@ -1958,7 +1788,7 @@
           <a:p>
             <a:fld id="{AD36792F-A28E-4983-A7F5-F40ED51D6004}" type="datetimeFigureOut">
               <a:rPr lang="nl-NL" smtClean="0"/>
-              <a:t>20-4-2026</a:t>
+              <a:t>7-5-2026</a:t>
             </a:fld>
             <a:endParaRPr lang="nl-NL"/>
           </a:p>
@@ -2373,7 +2203,7 @@
           <a:p>
             <a:fld id="{AD36792F-A28E-4983-A7F5-F40ED51D6004}" type="datetimeFigureOut">
               <a:rPr lang="nl-NL" smtClean="0"/>
-              <a:t>20-4-2026</a:t>
+              <a:t>7-5-2026</a:t>
             </a:fld>
             <a:endParaRPr lang="nl-NL"/>
           </a:p>
@@ -2515,7 +2345,7 @@
           <a:p>
             <a:fld id="{AD36792F-A28E-4983-A7F5-F40ED51D6004}" type="datetimeFigureOut">
               <a:rPr lang="nl-NL" smtClean="0"/>
-              <a:t>20-4-2026</a:t>
+              <a:t>7-5-2026</a:t>
             </a:fld>
             <a:endParaRPr lang="nl-NL"/>
           </a:p>
@@ -2628,7 +2458,7 @@
           <a:p>
             <a:fld id="{AD36792F-A28E-4983-A7F5-F40ED51D6004}" type="datetimeFigureOut">
               <a:rPr lang="nl-NL" smtClean="0"/>
-              <a:t>20-4-2026</a:t>
+              <a:t>7-5-2026</a:t>
             </a:fld>
             <a:endParaRPr lang="nl-NL"/>
           </a:p>
@@ -2941,7 +2771,7 @@
           <a:p>
             <a:fld id="{AD36792F-A28E-4983-A7F5-F40ED51D6004}" type="datetimeFigureOut">
               <a:rPr lang="nl-NL" smtClean="0"/>
-              <a:t>20-4-2026</a:t>
+              <a:t>7-5-2026</a:t>
             </a:fld>
             <a:endParaRPr lang="nl-NL"/>
           </a:p>
@@ -3230,7 +3060,7 @@
           <a:p>
             <a:fld id="{AD36792F-A28E-4983-A7F5-F40ED51D6004}" type="datetimeFigureOut">
               <a:rPr lang="nl-NL" smtClean="0"/>
-              <a:t>20-4-2026</a:t>
+              <a:t>7-5-2026</a:t>
             </a:fld>
             <a:endParaRPr lang="nl-NL"/>
           </a:p>
@@ -3480,7 +3310,7 @@
           <a:p>
             <a:fld id="{AD36792F-A28E-4983-A7F5-F40ED51D6004}" type="datetimeFigureOut">
               <a:rPr lang="nl-NL" smtClean="0"/>
-              <a:t>20-4-2026</a:t>
+              <a:t>7-5-2026</a:t>
             </a:fld>
             <a:endParaRPr lang="nl-NL"/>
           </a:p>
@@ -4006,170 +3836,6 @@
         <p:cNvPr id="1" name="">
           <a:extLst>
             <a:ext uri="{FF2B5EF4-FFF2-40B4-BE49-F238E27FC236}">
-              <a16:creationId xmlns:a16="http://schemas.microsoft.com/office/drawing/2014/main" id="{2EAACB33-43BE-EDF1-1A9E-034E28C6C768}"/>
-            </a:ext>
-          </a:extLst>
-        </p:cNvPr>
-        <p:cNvGrpSpPr/>
-        <p:nvPr/>
-      </p:nvGrpSpPr>
-      <p:grpSpPr>
-        <a:xfrm>
-          <a:off x="0" y="0"/>
-          <a:ext cx="0" cy="0"/>
-          <a:chOff x="0" y="0"/>
-          <a:chExt cx="0" cy="0"/>
-        </a:xfrm>
-      </p:grpSpPr>
-      <p:sp>
-        <p:nvSpPr>
-          <p:cNvPr id="2" name="Title 1">
-            <a:extLst>
-              <a:ext uri="{FF2B5EF4-FFF2-40B4-BE49-F238E27FC236}">
-                <a16:creationId xmlns:a16="http://schemas.microsoft.com/office/drawing/2014/main" id="{79ACB165-A2D9-F103-EA6F-93584CC5166C}"/>
-              </a:ext>
-            </a:extLst>
-          </p:cNvPr>
-          <p:cNvSpPr>
-            <a:spLocks noGrp="1"/>
-          </p:cNvSpPr>
-          <p:nvPr>
-            <p:ph type="title"/>
-          </p:nvPr>
-        </p:nvSpPr>
-        <p:spPr/>
-        <p:txBody>
-          <a:bodyPr/>
-          <a:lstStyle/>
-          <a:p>
-            <a:r>
-              <a:rPr lang="nl-NL" dirty="0"/>
-              <a:t>@@@@@@</a:t>
-            </a:r>
-          </a:p>
-        </p:txBody>
-      </p:sp>
-      <p:sp>
-        <p:nvSpPr>
-          <p:cNvPr id="3" name="Content Placeholder 2">
-            <a:extLst>
-              <a:ext uri="{FF2B5EF4-FFF2-40B4-BE49-F238E27FC236}">
-                <a16:creationId xmlns:a16="http://schemas.microsoft.com/office/drawing/2014/main" id="{18E7F1CB-60BD-BCA2-61ED-D714D805A39C}"/>
-              </a:ext>
-            </a:extLst>
-          </p:cNvPr>
-          <p:cNvSpPr>
-            <a:spLocks noGrp="1"/>
-          </p:cNvSpPr>
-          <p:nvPr>
-            <p:ph idx="1"/>
-          </p:nvPr>
-        </p:nvSpPr>
-        <p:spPr/>
-        <p:txBody>
-          <a:bodyPr>
-            <a:normAutofit/>
-          </a:bodyPr>
-          <a:lstStyle/>
-          <a:p>
-            <a:r>
-              <a:rPr lang="nl-NL" dirty="0"/>
-              <a:t>In de </a:t>
-            </a:r>
-            <a:r>
-              <a:rPr lang="nl-NL" dirty="0" err="1"/>
-              <a:t>blade</a:t>
-            </a:r>
-            <a:r>
-              <a:rPr lang="nl-NL" dirty="0"/>
-              <a:t> zie je veel @for @if </a:t>
-            </a:r>
-            <a:r>
-              <a:rPr lang="nl-NL" dirty="0" err="1"/>
-              <a:t>etc</a:t>
-            </a:r>
-            <a:endParaRPr lang="nl-NL" dirty="0"/>
-          </a:p>
-          <a:p>
-            <a:endParaRPr lang="nl-NL" dirty="0"/>
-          </a:p>
-          <a:p>
-            <a:r>
-              <a:rPr lang="nl-NL" dirty="0"/>
-              <a:t>Dit wordt gewoon een &lt;?</a:t>
-            </a:r>
-            <a:r>
-              <a:rPr lang="nl-NL" dirty="0" err="1"/>
-              <a:t>php</a:t>
-            </a:r>
-            <a:r>
-              <a:rPr lang="nl-NL" dirty="0"/>
-              <a:t> </a:t>
-            </a:r>
-            <a:r>
-              <a:rPr lang="nl-NL" dirty="0" err="1"/>
-              <a:t>for</a:t>
-            </a:r>
-            <a:r>
-              <a:rPr lang="nl-NL" dirty="0"/>
-              <a:t>….</a:t>
-            </a:r>
-          </a:p>
-          <a:p>
-            <a:endParaRPr lang="nl-NL" dirty="0"/>
-          </a:p>
-          <a:p>
-            <a:r>
-              <a:rPr lang="nl-NL" dirty="0"/>
-              <a:t>Maar is:</a:t>
-            </a:r>
-          </a:p>
-          <a:p>
-            <a:pPr lvl="1"/>
-            <a:r>
-              <a:rPr lang="nl-NL" dirty="0"/>
-              <a:t>snelle typen</a:t>
-            </a:r>
-          </a:p>
-          <a:p>
-            <a:pPr lvl="1"/>
-            <a:r>
-              <a:rPr lang="nl-NL" dirty="0"/>
-              <a:t>cleaner om te zien</a:t>
-            </a:r>
-          </a:p>
-          <a:p>
-            <a:endParaRPr lang="nl-NL" dirty="0"/>
-          </a:p>
-          <a:p>
-            <a:r>
-              <a:rPr lang="nl-NL" dirty="0"/>
-              <a:t>Syntax Sugar ^^</a:t>
-            </a:r>
-          </a:p>
-        </p:txBody>
-      </p:sp>
-    </p:spTree>
-    <p:extLst>
-      <p:ext uri="{BB962C8B-B14F-4D97-AF65-F5344CB8AC3E}">
-        <p14:creationId xmlns:p14="http://schemas.microsoft.com/office/powerpoint/2010/main" val="218540331"/>
-      </p:ext>
-    </p:extLst>
-  </p:cSld>
-  <p:clrMapOvr>
-    <a:masterClrMapping/>
-  </p:clrMapOvr>
-</p:sld>
-</file>
-
-<file path=ppt/slides/slide11.xml><?xml version="1.0" encoding="utf-8"?>
-<p:sld xmlns:a="http://schemas.openxmlformats.org/drawingml/2006/main" xmlns:r="http://schemas.openxmlformats.org/officeDocument/2006/relationships" xmlns:p="http://schemas.openxmlformats.org/presentationml/2006/main">
-  <p:cSld>
-    <p:spTree>
-      <p:nvGrpSpPr>
-        <p:cNvPr id="1" name="">
-          <a:extLst>
-            <a:ext uri="{FF2B5EF4-FFF2-40B4-BE49-F238E27FC236}">
               <a16:creationId xmlns:a16="http://schemas.microsoft.com/office/drawing/2014/main" id="{4232822C-E8FA-9692-E1A0-E0A665EA73A2}"/>
             </a:ext>
           </a:extLst>
@@ -4337,7 +4003,7 @@
 </p:sld>
 </file>
 
-<file path=ppt/slides/slide12.xml><?xml version="1.0" encoding="utf-8"?>
+<file path=ppt/slides/slide11.xml><?xml version="1.0" encoding="utf-8"?>
 <p:sld xmlns:a="http://schemas.openxmlformats.org/drawingml/2006/main" xmlns:r="http://schemas.openxmlformats.org/officeDocument/2006/relationships" xmlns:p="http://schemas.openxmlformats.org/presentationml/2006/main">
   <p:cSld>
     <p:spTree>
@@ -4466,7 +4132,7 @@
 </p:sld>
 </file>
 
-<file path=ppt/slides/slide13.xml><?xml version="1.0" encoding="utf-8"?>
+<file path=ppt/slides/slide12.xml><?xml version="1.0" encoding="utf-8"?>
 <p:sld xmlns:a="http://schemas.openxmlformats.org/drawingml/2006/main" xmlns:r="http://schemas.openxmlformats.org/officeDocument/2006/relationships" xmlns:p="http://schemas.openxmlformats.org/presentationml/2006/main">
   <p:cSld>
     <p:spTree>
@@ -4650,7 +4316,7 @@
 </p:sld>
 </file>
 
-<file path=ppt/slides/slide14.xml><?xml version="1.0" encoding="utf-8"?>
+<file path=ppt/slides/slide13.xml><?xml version="1.0" encoding="utf-8"?>
 <p:sld xmlns:a="http://schemas.openxmlformats.org/drawingml/2006/main" xmlns:r="http://schemas.openxmlformats.org/officeDocument/2006/relationships" xmlns:p="http://schemas.openxmlformats.org/presentationml/2006/main">
   <p:cSld>
     <p:spTree>
@@ -4856,7 +4522,7 @@
 </p:sld>
 </file>
 
-<file path=ppt/slides/slide15.xml><?xml version="1.0" encoding="utf-8"?>
+<file path=ppt/slides/slide14.xml><?xml version="1.0" encoding="utf-8"?>
 <p:sld xmlns:a="http://schemas.openxmlformats.org/drawingml/2006/main" xmlns:r="http://schemas.openxmlformats.org/officeDocument/2006/relationships" xmlns:p="http://schemas.openxmlformats.org/presentationml/2006/main">
   <p:cSld>
     <p:spTree>
@@ -4958,7 +4624,7 @@
               <a:rPr lang="nl-NL" dirty="0">
                 <a:hlinkClick r:id="rId3"/>
               </a:rPr>
-              <a:t>https://github.com/progsen/m8prog_laravel/tree/main/week1</a:t>
+              <a:t>https://github.com/progsen/m8prog_laravel/tree/main</a:t>
             </a:r>
             <a:endParaRPr lang="nl-NL" dirty="0"/>
           </a:p>
@@ -4969,10 +4635,10 @@
       </p:sp>
       <p:pic>
         <p:nvPicPr>
-          <p:cNvPr id="7" name="Picture 6">
-            <a:extLst>
-              <a:ext uri="{FF2B5EF4-FFF2-40B4-BE49-F238E27FC236}">
-                <a16:creationId xmlns:a16="http://schemas.microsoft.com/office/drawing/2014/main" id="{4D8ECB68-BDA5-DC99-0458-1255A5FC22FA}"/>
+          <p:cNvPr id="5" name="Picture 4">
+            <a:extLst>
+              <a:ext uri="{FF2B5EF4-FFF2-40B4-BE49-F238E27FC236}">
+                <a16:creationId xmlns:a16="http://schemas.microsoft.com/office/drawing/2014/main" id="{2B35C14B-EE40-E53C-DCF2-153E05F710B9}"/>
               </a:ext>
             </a:extLst>
           </p:cNvPr>
@@ -4989,8 +4655,8 @@
         </p:blipFill>
         <p:spPr>
           <a:xfrm>
-            <a:off x="6962775" y="1825624"/>
-            <a:ext cx="4391025" cy="3981450"/>
+            <a:off x="7081355" y="2263366"/>
+            <a:ext cx="4981774" cy="3942172"/>
           </a:xfrm>
           <a:prstGeom prst="rect">
             <a:avLst/>
@@ -6096,7 +5762,7 @@
         <p:cNvPr id="1" name="">
           <a:extLst>
             <a:ext uri="{FF2B5EF4-FFF2-40B4-BE49-F238E27FC236}">
-              <a16:creationId xmlns:a16="http://schemas.microsoft.com/office/drawing/2014/main" id="{FA5BEFF5-D2CB-6BF2-8AAE-4FE5D4DE3B6E}"/>
+              <a16:creationId xmlns:a16="http://schemas.microsoft.com/office/drawing/2014/main" id="{2EAACB33-43BE-EDF1-1A9E-034E28C6C768}"/>
             </a:ext>
           </a:extLst>
         </p:cNvPr>
@@ -6116,7 +5782,7 @@
           <p:cNvPr id="2" name="Title 1">
             <a:extLst>
               <a:ext uri="{FF2B5EF4-FFF2-40B4-BE49-F238E27FC236}">
-                <a16:creationId xmlns:a16="http://schemas.microsoft.com/office/drawing/2014/main" id="{497A2A67-F037-9080-587E-A95642C44C69}"/>
+                <a16:creationId xmlns:a16="http://schemas.microsoft.com/office/drawing/2014/main" id="{79ACB165-A2D9-F103-EA6F-93584CC5166C}"/>
               </a:ext>
             </a:extLst>
           </p:cNvPr>
@@ -6134,15 +5800,7 @@
           <a:p>
             <a:r>
               <a:rPr lang="nl-NL" dirty="0"/>
-              <a:t>.</a:t>
-            </a:r>
-            <a:r>
-              <a:rPr lang="nl-NL" dirty="0" err="1"/>
-              <a:t>blade.php</a:t>
-            </a:r>
-            <a:r>
-              <a:rPr lang="nl-NL" dirty="0"/>
-              <a:t>?</a:t>
+              <a:t>@@@@@@</a:t>
             </a:r>
           </a:p>
         </p:txBody>
@@ -6152,7 +5810,7 @@
           <p:cNvPr id="3" name="Content Placeholder 2">
             <a:extLst>
               <a:ext uri="{FF2B5EF4-FFF2-40B4-BE49-F238E27FC236}">
-                <a16:creationId xmlns:a16="http://schemas.microsoft.com/office/drawing/2014/main" id="{DB8239F4-8D8F-D0CE-C5B1-6C5A90CA326A}"/>
+                <a16:creationId xmlns:a16="http://schemas.microsoft.com/office/drawing/2014/main" id="{18E7F1CB-60BD-BCA2-61ED-D714D805A39C}"/>
               </a:ext>
             </a:extLst>
           </p:cNvPr>
@@ -6172,80 +5830,77 @@
           <a:p>
             <a:r>
               <a:rPr lang="nl-NL" dirty="0"/>
-              <a:t>Een html pagina, net als </a:t>
+              <a:t>In de </a:t>
+            </a:r>
+            <a:r>
+              <a:rPr lang="nl-NL" dirty="0" err="1"/>
+              <a:t>blade</a:t>
+            </a:r>
+            <a:r>
+              <a:rPr lang="nl-NL" dirty="0"/>
+              <a:t> zie je veel @for @if </a:t>
+            </a:r>
+            <a:r>
+              <a:rPr lang="nl-NL" dirty="0" err="1"/>
+              <a:t>etc</a:t>
+            </a:r>
+            <a:endParaRPr lang="nl-NL" dirty="0"/>
+          </a:p>
+          <a:p>
+            <a:endParaRPr lang="nl-NL" dirty="0"/>
+          </a:p>
+          <a:p>
+            <a:r>
+              <a:rPr lang="nl-NL" dirty="0"/>
+              <a:t>Dit wordt gewoon een &lt;?</a:t>
             </a:r>
             <a:r>
               <a:rPr lang="nl-NL" dirty="0" err="1"/>
               <a:t>php</a:t>
             </a:r>
+            <a:r>
+              <a:rPr lang="nl-NL" dirty="0"/>
+              <a:t> </a:t>
+            </a:r>
+            <a:r>
+              <a:rPr lang="nl-NL" dirty="0" err="1"/>
+              <a:t>for</a:t>
+            </a:r>
+            <a:r>
+              <a:rPr lang="nl-NL" dirty="0"/>
+              <a:t>….</a:t>
+            </a:r>
+          </a:p>
+          <a:p>
             <a:endParaRPr lang="nl-NL" dirty="0"/>
           </a:p>
           <a:p>
+            <a:r>
+              <a:rPr lang="nl-NL" dirty="0"/>
+              <a:t>Maar is:</a:t>
+            </a:r>
+          </a:p>
+          <a:p>
             <a:pPr lvl="1"/>
             <a:r>
               <a:rPr lang="nl-NL" dirty="0"/>
-              <a:t>Dus met </a:t>
-            </a:r>
-            <a:r>
-              <a:rPr lang="nl-NL" dirty="0" err="1"/>
-              <a:t>php</a:t>
-            </a:r>
-            <a:r>
-              <a:rPr lang="nl-NL" dirty="0"/>
-              <a:t> logica</a:t>
-            </a:r>
-          </a:p>
-          <a:p>
-            <a:r>
-              <a:rPr lang="nl-NL" dirty="0"/>
-              <a:t>Kan ook erven of een deel component zijn</a:t>
+              <a:t>snelle typen</a:t>
             </a:r>
           </a:p>
           <a:p>
             <a:pPr lvl="1"/>
             <a:r>
               <a:rPr lang="nl-NL" dirty="0"/>
-              <a:t>Dus bv alleen een login form</a:t>
-            </a:r>
-          </a:p>
-          <a:p>
-            <a:pPr lvl="1"/>
+              <a:t>cleaner om te zien</a:t>
+            </a:r>
+          </a:p>
+          <a:p>
             <a:endParaRPr lang="nl-NL" dirty="0"/>
           </a:p>
           <a:p>
             <a:r>
               <a:rPr lang="nl-NL" dirty="0"/>
-              <a:t>Geen </a:t>
-            </a:r>
-            <a:r>
-              <a:rPr lang="nl-NL" dirty="0" err="1"/>
-              <a:t>includes</a:t>
-            </a:r>
-            <a:r>
-              <a:rPr lang="nl-NL" dirty="0"/>
-              <a:t> maar andere vorm </a:t>
-            </a:r>
-          </a:p>
-          <a:p>
-            <a:pPr lvl="1"/>
-            <a:r>
-              <a:rPr lang="nl-NL" dirty="0"/>
-              <a:t>&lt;x-mijn-component&gt;</a:t>
-            </a:r>
-          </a:p>
-          <a:p>
-            <a:pPr lvl="1"/>
-            <a:r>
-              <a:rPr lang="nl-NL" dirty="0"/>
-              <a:t>&lt;x-app-</a:t>
-            </a:r>
-            <a:r>
-              <a:rPr lang="nl-NL" dirty="0" err="1"/>
-              <a:t>layout</a:t>
-            </a:r>
-            <a:r>
-              <a:rPr lang="nl-NL" dirty="0"/>
-              <a:t>&gt;</a:t>
+              <a:t>Syntax Sugar ^^</a:t>
             </a:r>
           </a:p>
         </p:txBody>
@@ -6253,7 +5908,7 @@
     </p:spTree>
     <p:extLst>
       <p:ext uri="{BB962C8B-B14F-4D97-AF65-F5344CB8AC3E}">
-        <p14:creationId xmlns:p14="http://schemas.microsoft.com/office/powerpoint/2010/main" val="2729798725"/>
+        <p14:creationId xmlns:p14="http://schemas.microsoft.com/office/powerpoint/2010/main" val="218540331"/>
       </p:ext>
     </p:extLst>
   </p:cSld>

--- a/week1 - Laravel Intro/M8Prog laravel 01 - Kickoff.pptx
+++ b/week1 - Laravel Intro/M8Prog laravel 01 - Kickoff.pptx
@@ -9,16 +9,17 @@
     <p:sldId id="258" r:id="rId3"/>
     <p:sldId id="257" r:id="rId4"/>
     <p:sldId id="264" r:id="rId5"/>
-    <p:sldId id="265" r:id="rId6"/>
-    <p:sldId id="267" r:id="rId7"/>
-    <p:sldId id="268" r:id="rId8"/>
-    <p:sldId id="269" r:id="rId9"/>
-    <p:sldId id="272" r:id="rId10"/>
-    <p:sldId id="273" r:id="rId11"/>
-    <p:sldId id="275" r:id="rId12"/>
-    <p:sldId id="274" r:id="rId13"/>
-    <p:sldId id="276" r:id="rId14"/>
-    <p:sldId id="277" r:id="rId15"/>
+    <p:sldId id="278" r:id="rId6"/>
+    <p:sldId id="265" r:id="rId7"/>
+    <p:sldId id="267" r:id="rId8"/>
+    <p:sldId id="268" r:id="rId9"/>
+    <p:sldId id="269" r:id="rId10"/>
+    <p:sldId id="272" r:id="rId11"/>
+    <p:sldId id="273" r:id="rId12"/>
+    <p:sldId id="275" r:id="rId13"/>
+    <p:sldId id="274" r:id="rId14"/>
+    <p:sldId id="276" r:id="rId15"/>
+    <p:sldId id="277" r:id="rId16"/>
   </p:sldIdLst>
   <p:sldSz cx="12192000" cy="6858000"/>
   <p:notesSz cx="6858000" cy="9144000"/>
@@ -128,7 +129,7 @@
 <file path=ppt/revisionInfo.xml><?xml version="1.0" encoding="utf-8"?>
 <p1510:revInfo xmlns:a="http://schemas.openxmlformats.org/drawingml/2006/main" xmlns:r="http://schemas.openxmlformats.org/officeDocument/2006/relationships" xmlns:p1510="http://schemas.microsoft.com/office/powerpoint/2015/10/main">
   <p1510:revLst>
-    <p1510:client id="{8480E6ED-9360-4FC2-B127-D918C1499FC1}" v="2" dt="2026-05-07T09:58:14.726"/>
+    <p1510:client id="{8480E6ED-9360-4FC2-B127-D918C1499FC1}" v="3" dt="2026-05-11T06:16:23.814"/>
   </p1510:revLst>
 </p1510:revInfo>
 </file>
@@ -138,7 +139,7 @@
   <pc:docChgLst>
     <pc:chgData name="Dragan Javorac" userId="913c2858-fb97-4c6e-a42c-b1f1a16b225e" providerId="ADAL" clId="{BC00D9DF-F858-4149-8B7B-F211D448CEDA}"/>
     <pc:docChg chg="undo custSel addSld delSld modSld sldOrd">
-      <pc:chgData name="Dragan Javorac" userId="913c2858-fb97-4c6e-a42c-b1f1a16b225e" providerId="ADAL" clId="{BC00D9DF-F858-4149-8B7B-F211D448CEDA}" dt="2026-05-07T09:58:55.926" v="1452" actId="14100"/>
+      <pc:chgData name="Dragan Javorac" userId="913c2858-fb97-4c6e-a42c-b1f1a16b225e" providerId="ADAL" clId="{BC00D9DF-F858-4149-8B7B-F211D448CEDA}" dt="2026-05-11T06:53:18.717" v="1669" actId="14100"/>
       <pc:docMkLst>
         <pc:docMk/>
       </pc:docMkLst>
@@ -172,12 +173,20 @@
           </ac:spMkLst>
         </pc:spChg>
       </pc:sldChg>
-      <pc:sldChg chg="add">
-        <pc:chgData name="Dragan Javorac" userId="913c2858-fb97-4c6e-a42c-b1f1a16b225e" providerId="ADAL" clId="{BC00D9DF-F858-4149-8B7B-F211D448CEDA}" dt="2026-04-20T13:58:14.417" v="1312"/>
+      <pc:sldChg chg="modSp add mod">
+        <pc:chgData name="Dragan Javorac" userId="913c2858-fb97-4c6e-a42c-b1f1a16b225e" providerId="ADAL" clId="{BC00D9DF-F858-4149-8B7B-F211D448CEDA}" dt="2026-05-11T06:16:20.687" v="1464" actId="20577"/>
         <pc:sldMkLst>
           <pc:docMk/>
           <pc:sldMk cId="4216161161" sldId="264"/>
         </pc:sldMkLst>
+        <pc:spChg chg="mod">
+          <ac:chgData name="Dragan Javorac" userId="913c2858-fb97-4c6e-a42c-b1f1a16b225e" providerId="ADAL" clId="{BC00D9DF-F858-4149-8B7B-F211D448CEDA}" dt="2026-05-11T06:16:20.687" v="1464" actId="20577"/>
+          <ac:spMkLst>
+            <pc:docMk/>
+            <pc:sldMk cId="4216161161" sldId="264"/>
+            <ac:spMk id="3" creationId="{0A78FE0D-D5EE-A73A-3D04-F5666CB44FB6}"/>
+          </ac:spMkLst>
+        </pc:spChg>
       </pc:sldChg>
       <pc:sldChg chg="modSp mod">
         <pc:chgData name="Dragan Javorac" userId="913c2858-fb97-4c6e-a42c-b1f1a16b225e" providerId="ADAL" clId="{BC00D9DF-F858-4149-8B7B-F211D448CEDA}" dt="2026-04-20T12:57:07.869" v="347" actId="20577"/>
@@ -262,13 +271,6 @@
             <ac:picMk id="5" creationId="{BAC3E76A-0EA3-5951-5885-632F43C5F7DE}"/>
           </ac:picMkLst>
         </pc:picChg>
-      </pc:sldChg>
-      <pc:sldChg chg="add del">
-        <pc:chgData name="Dragan Javorac" userId="913c2858-fb97-4c6e-a42c-b1f1a16b225e" providerId="ADAL" clId="{BC00D9DF-F858-4149-8B7B-F211D448CEDA}" dt="2026-05-07T09:56:50.655" v="1444" actId="47"/>
-        <pc:sldMkLst>
-          <pc:docMk/>
-          <pc:sldMk cId="2729798725" sldId="271"/>
-        </pc:sldMkLst>
       </pc:sldChg>
       <pc:sldChg chg="modSp add mod">
         <pc:chgData name="Dragan Javorac" userId="913c2858-fb97-4c6e-a42c-b1f1a16b225e" providerId="ADAL" clId="{BC00D9DF-F858-4149-8B7B-F211D448CEDA}" dt="2026-04-20T13:07:51.355" v="1065" actId="20577"/>
@@ -471,12 +473,35 @@
             <ac:picMk id="5" creationId="{2B35C14B-EE40-E53C-DCF2-153E05F710B9}"/>
           </ac:picMkLst>
         </pc:picChg>
-        <pc:picChg chg="add del mod">
-          <ac:chgData name="Dragan Javorac" userId="913c2858-fb97-4c6e-a42c-b1f1a16b225e" providerId="ADAL" clId="{BC00D9DF-F858-4149-8B7B-F211D448CEDA}" dt="2026-05-07T09:58:52.250" v="1449" actId="478"/>
+      </pc:sldChg>
+      <pc:sldChg chg="delSp modSp add mod">
+        <pc:chgData name="Dragan Javorac" userId="913c2858-fb97-4c6e-a42c-b1f1a16b225e" providerId="ADAL" clId="{BC00D9DF-F858-4149-8B7B-F211D448CEDA}" dt="2026-05-11T06:53:18.717" v="1669" actId="14100"/>
+        <pc:sldMkLst>
+          <pc:docMk/>
+          <pc:sldMk cId="3784629920" sldId="278"/>
+        </pc:sldMkLst>
+        <pc:spChg chg="mod">
+          <ac:chgData name="Dragan Javorac" userId="913c2858-fb97-4c6e-a42c-b1f1a16b225e" providerId="ADAL" clId="{BC00D9DF-F858-4149-8B7B-F211D448CEDA}" dt="2026-05-11T06:16:33.362" v="1492" actId="20577"/>
+          <ac:spMkLst>
+            <pc:docMk/>
+            <pc:sldMk cId="3784629920" sldId="278"/>
+            <ac:spMk id="2" creationId="{40A7B55D-529C-13A7-E740-2FAB3FEE61DC}"/>
+          </ac:spMkLst>
+        </pc:spChg>
+        <pc:spChg chg="mod">
+          <ac:chgData name="Dragan Javorac" userId="913c2858-fb97-4c6e-a42c-b1f1a16b225e" providerId="ADAL" clId="{BC00D9DF-F858-4149-8B7B-F211D448CEDA}" dt="2026-05-11T06:53:18.717" v="1669" actId="14100"/>
+          <ac:spMkLst>
+            <pc:docMk/>
+            <pc:sldMk cId="3784629920" sldId="278"/>
+            <ac:spMk id="3" creationId="{D05685E2-71C0-EBAF-231E-B159B81562D5}"/>
+          </ac:spMkLst>
+        </pc:spChg>
+        <pc:picChg chg="del">
+          <ac:chgData name="Dragan Javorac" userId="913c2858-fb97-4c6e-a42c-b1f1a16b225e" providerId="ADAL" clId="{BC00D9DF-F858-4149-8B7B-F211D448CEDA}" dt="2026-05-11T06:16:39.781" v="1493" actId="478"/>
           <ac:picMkLst>
             <pc:docMk/>
-            <pc:sldMk cId="1039330640" sldId="277"/>
-            <ac:picMk id="7" creationId="{4D8ECB68-BDA5-DC99-0458-1255A5FC22FA}"/>
+            <pc:sldMk cId="3784629920" sldId="278"/>
+            <ac:picMk id="5" creationId="{101ABD39-E080-102A-E372-9215E30EC279}"/>
           </ac:picMkLst>
         </pc:picChg>
       </pc:sldChg>
@@ -634,7 +659,7 @@
           <a:p>
             <a:fld id="{AD36792F-A28E-4983-A7F5-F40ED51D6004}" type="datetimeFigureOut">
               <a:rPr lang="nl-NL" smtClean="0"/>
-              <a:t>7-5-2026</a:t>
+              <a:t>11-5-2026</a:t>
             </a:fld>
             <a:endParaRPr lang="nl-NL"/>
           </a:p>
@@ -834,7 +859,7 @@
           <a:p>
             <a:fld id="{AD36792F-A28E-4983-A7F5-F40ED51D6004}" type="datetimeFigureOut">
               <a:rPr lang="nl-NL" smtClean="0"/>
-              <a:t>7-5-2026</a:t>
+              <a:t>11-5-2026</a:t>
             </a:fld>
             <a:endParaRPr lang="nl-NL"/>
           </a:p>
@@ -1044,7 +1069,7 @@
           <a:p>
             <a:fld id="{AD36792F-A28E-4983-A7F5-F40ED51D6004}" type="datetimeFigureOut">
               <a:rPr lang="nl-NL" smtClean="0"/>
-              <a:t>7-5-2026</a:t>
+              <a:t>11-5-2026</a:t>
             </a:fld>
             <a:endParaRPr lang="nl-NL"/>
           </a:p>
@@ -1244,7 +1269,7 @@
           <a:p>
             <a:fld id="{AD36792F-A28E-4983-A7F5-F40ED51D6004}" type="datetimeFigureOut">
               <a:rPr lang="nl-NL" smtClean="0"/>
-              <a:t>7-5-2026</a:t>
+              <a:t>11-5-2026</a:t>
             </a:fld>
             <a:endParaRPr lang="nl-NL"/>
           </a:p>
@@ -1520,7 +1545,7 @@
           <a:p>
             <a:fld id="{AD36792F-A28E-4983-A7F5-F40ED51D6004}" type="datetimeFigureOut">
               <a:rPr lang="nl-NL" smtClean="0"/>
-              <a:t>7-5-2026</a:t>
+              <a:t>11-5-2026</a:t>
             </a:fld>
             <a:endParaRPr lang="nl-NL"/>
           </a:p>
@@ -1788,7 +1813,7 @@
           <a:p>
             <a:fld id="{AD36792F-A28E-4983-A7F5-F40ED51D6004}" type="datetimeFigureOut">
               <a:rPr lang="nl-NL" smtClean="0"/>
-              <a:t>7-5-2026</a:t>
+              <a:t>11-5-2026</a:t>
             </a:fld>
             <a:endParaRPr lang="nl-NL"/>
           </a:p>
@@ -2203,7 +2228,7 @@
           <a:p>
             <a:fld id="{AD36792F-A28E-4983-A7F5-F40ED51D6004}" type="datetimeFigureOut">
               <a:rPr lang="nl-NL" smtClean="0"/>
-              <a:t>7-5-2026</a:t>
+              <a:t>11-5-2026</a:t>
             </a:fld>
             <a:endParaRPr lang="nl-NL"/>
           </a:p>
@@ -2345,7 +2370,7 @@
           <a:p>
             <a:fld id="{AD36792F-A28E-4983-A7F5-F40ED51D6004}" type="datetimeFigureOut">
               <a:rPr lang="nl-NL" smtClean="0"/>
-              <a:t>7-5-2026</a:t>
+              <a:t>11-5-2026</a:t>
             </a:fld>
             <a:endParaRPr lang="nl-NL"/>
           </a:p>
@@ -2458,7 +2483,7 @@
           <a:p>
             <a:fld id="{AD36792F-A28E-4983-A7F5-F40ED51D6004}" type="datetimeFigureOut">
               <a:rPr lang="nl-NL" smtClean="0"/>
-              <a:t>7-5-2026</a:t>
+              <a:t>11-5-2026</a:t>
             </a:fld>
             <a:endParaRPr lang="nl-NL"/>
           </a:p>
@@ -2771,7 +2796,7 @@
           <a:p>
             <a:fld id="{AD36792F-A28E-4983-A7F5-F40ED51D6004}" type="datetimeFigureOut">
               <a:rPr lang="nl-NL" smtClean="0"/>
-              <a:t>7-5-2026</a:t>
+              <a:t>11-5-2026</a:t>
             </a:fld>
             <a:endParaRPr lang="nl-NL"/>
           </a:p>
@@ -3060,7 +3085,7 @@
           <a:p>
             <a:fld id="{AD36792F-A28E-4983-A7F5-F40ED51D6004}" type="datetimeFigureOut">
               <a:rPr lang="nl-NL" smtClean="0"/>
-              <a:t>7-5-2026</a:t>
+              <a:t>11-5-2026</a:t>
             </a:fld>
             <a:endParaRPr lang="nl-NL"/>
           </a:p>
@@ -3310,7 +3335,7 @@
           <a:p>
             <a:fld id="{AD36792F-A28E-4983-A7F5-F40ED51D6004}" type="datetimeFigureOut">
               <a:rPr lang="nl-NL" smtClean="0"/>
-              <a:t>7-5-2026</a:t>
+              <a:t>11-5-2026</a:t>
             </a:fld>
             <a:endParaRPr lang="nl-NL"/>
           </a:p>
@@ -3836,6 +3861,170 @@
         <p:cNvPr id="1" name="">
           <a:extLst>
             <a:ext uri="{FF2B5EF4-FFF2-40B4-BE49-F238E27FC236}">
+              <a16:creationId xmlns:a16="http://schemas.microsoft.com/office/drawing/2014/main" id="{2EAACB33-43BE-EDF1-1A9E-034E28C6C768}"/>
+            </a:ext>
+          </a:extLst>
+        </p:cNvPr>
+        <p:cNvGrpSpPr/>
+        <p:nvPr/>
+      </p:nvGrpSpPr>
+      <p:grpSpPr>
+        <a:xfrm>
+          <a:off x="0" y="0"/>
+          <a:ext cx="0" cy="0"/>
+          <a:chOff x="0" y="0"/>
+          <a:chExt cx="0" cy="0"/>
+        </a:xfrm>
+      </p:grpSpPr>
+      <p:sp>
+        <p:nvSpPr>
+          <p:cNvPr id="2" name="Title 1">
+            <a:extLst>
+              <a:ext uri="{FF2B5EF4-FFF2-40B4-BE49-F238E27FC236}">
+                <a16:creationId xmlns:a16="http://schemas.microsoft.com/office/drawing/2014/main" id="{79ACB165-A2D9-F103-EA6F-93584CC5166C}"/>
+              </a:ext>
+            </a:extLst>
+          </p:cNvPr>
+          <p:cNvSpPr>
+            <a:spLocks noGrp="1"/>
+          </p:cNvSpPr>
+          <p:nvPr>
+            <p:ph type="title"/>
+          </p:nvPr>
+        </p:nvSpPr>
+        <p:spPr/>
+        <p:txBody>
+          <a:bodyPr/>
+          <a:lstStyle/>
+          <a:p>
+            <a:r>
+              <a:rPr lang="nl-NL" dirty="0"/>
+              <a:t>@@@@@@</a:t>
+            </a:r>
+          </a:p>
+        </p:txBody>
+      </p:sp>
+      <p:sp>
+        <p:nvSpPr>
+          <p:cNvPr id="3" name="Content Placeholder 2">
+            <a:extLst>
+              <a:ext uri="{FF2B5EF4-FFF2-40B4-BE49-F238E27FC236}">
+                <a16:creationId xmlns:a16="http://schemas.microsoft.com/office/drawing/2014/main" id="{18E7F1CB-60BD-BCA2-61ED-D714D805A39C}"/>
+              </a:ext>
+            </a:extLst>
+          </p:cNvPr>
+          <p:cNvSpPr>
+            <a:spLocks noGrp="1"/>
+          </p:cNvSpPr>
+          <p:nvPr>
+            <p:ph idx="1"/>
+          </p:nvPr>
+        </p:nvSpPr>
+        <p:spPr/>
+        <p:txBody>
+          <a:bodyPr>
+            <a:normAutofit/>
+          </a:bodyPr>
+          <a:lstStyle/>
+          <a:p>
+            <a:r>
+              <a:rPr lang="nl-NL" dirty="0"/>
+              <a:t>In de </a:t>
+            </a:r>
+            <a:r>
+              <a:rPr lang="nl-NL" dirty="0" err="1"/>
+              <a:t>blade</a:t>
+            </a:r>
+            <a:r>
+              <a:rPr lang="nl-NL" dirty="0"/>
+              <a:t> zie je veel @for @if </a:t>
+            </a:r>
+            <a:r>
+              <a:rPr lang="nl-NL" dirty="0" err="1"/>
+              <a:t>etc</a:t>
+            </a:r>
+            <a:endParaRPr lang="nl-NL" dirty="0"/>
+          </a:p>
+          <a:p>
+            <a:endParaRPr lang="nl-NL" dirty="0"/>
+          </a:p>
+          <a:p>
+            <a:r>
+              <a:rPr lang="nl-NL" dirty="0"/>
+              <a:t>Dit wordt gewoon een &lt;?</a:t>
+            </a:r>
+            <a:r>
+              <a:rPr lang="nl-NL" dirty="0" err="1"/>
+              <a:t>php</a:t>
+            </a:r>
+            <a:r>
+              <a:rPr lang="nl-NL" dirty="0"/>
+              <a:t> </a:t>
+            </a:r>
+            <a:r>
+              <a:rPr lang="nl-NL" dirty="0" err="1"/>
+              <a:t>for</a:t>
+            </a:r>
+            <a:r>
+              <a:rPr lang="nl-NL" dirty="0"/>
+              <a:t>….</a:t>
+            </a:r>
+          </a:p>
+          <a:p>
+            <a:endParaRPr lang="nl-NL" dirty="0"/>
+          </a:p>
+          <a:p>
+            <a:r>
+              <a:rPr lang="nl-NL" dirty="0"/>
+              <a:t>Maar is:</a:t>
+            </a:r>
+          </a:p>
+          <a:p>
+            <a:pPr lvl="1"/>
+            <a:r>
+              <a:rPr lang="nl-NL" dirty="0"/>
+              <a:t>snelle typen</a:t>
+            </a:r>
+          </a:p>
+          <a:p>
+            <a:pPr lvl="1"/>
+            <a:r>
+              <a:rPr lang="nl-NL" dirty="0"/>
+              <a:t>cleaner om te zien</a:t>
+            </a:r>
+          </a:p>
+          <a:p>
+            <a:endParaRPr lang="nl-NL" dirty="0"/>
+          </a:p>
+          <a:p>
+            <a:r>
+              <a:rPr lang="nl-NL" dirty="0"/>
+              <a:t>Syntax Sugar ^^</a:t>
+            </a:r>
+          </a:p>
+        </p:txBody>
+      </p:sp>
+    </p:spTree>
+    <p:extLst>
+      <p:ext uri="{BB962C8B-B14F-4D97-AF65-F5344CB8AC3E}">
+        <p14:creationId xmlns:p14="http://schemas.microsoft.com/office/powerpoint/2010/main" val="218540331"/>
+      </p:ext>
+    </p:extLst>
+  </p:cSld>
+  <p:clrMapOvr>
+    <a:masterClrMapping/>
+  </p:clrMapOvr>
+</p:sld>
+</file>
+
+<file path=ppt/slides/slide11.xml><?xml version="1.0" encoding="utf-8"?>
+<p:sld xmlns:a="http://schemas.openxmlformats.org/drawingml/2006/main" xmlns:r="http://schemas.openxmlformats.org/officeDocument/2006/relationships" xmlns:p="http://schemas.openxmlformats.org/presentationml/2006/main">
+  <p:cSld>
+    <p:spTree>
+      <p:nvGrpSpPr>
+        <p:cNvPr id="1" name="">
+          <a:extLst>
+            <a:ext uri="{FF2B5EF4-FFF2-40B4-BE49-F238E27FC236}">
               <a16:creationId xmlns:a16="http://schemas.microsoft.com/office/drawing/2014/main" id="{4232822C-E8FA-9692-E1A0-E0A665EA73A2}"/>
             </a:ext>
           </a:extLst>
@@ -4003,7 +4192,7 @@
 </p:sld>
 </file>
 
-<file path=ppt/slides/slide11.xml><?xml version="1.0" encoding="utf-8"?>
+<file path=ppt/slides/slide12.xml><?xml version="1.0" encoding="utf-8"?>
 <p:sld xmlns:a="http://schemas.openxmlformats.org/drawingml/2006/main" xmlns:r="http://schemas.openxmlformats.org/officeDocument/2006/relationships" xmlns:p="http://schemas.openxmlformats.org/presentationml/2006/main">
   <p:cSld>
     <p:spTree>
@@ -4132,7 +4321,7 @@
 </p:sld>
 </file>
 
-<file path=ppt/slides/slide12.xml><?xml version="1.0" encoding="utf-8"?>
+<file path=ppt/slides/slide13.xml><?xml version="1.0" encoding="utf-8"?>
 <p:sld xmlns:a="http://schemas.openxmlformats.org/drawingml/2006/main" xmlns:r="http://schemas.openxmlformats.org/officeDocument/2006/relationships" xmlns:p="http://schemas.openxmlformats.org/presentationml/2006/main">
   <p:cSld>
     <p:spTree>
@@ -4316,7 +4505,7 @@
 </p:sld>
 </file>
 
-<file path=ppt/slides/slide13.xml><?xml version="1.0" encoding="utf-8"?>
+<file path=ppt/slides/slide14.xml><?xml version="1.0" encoding="utf-8"?>
 <p:sld xmlns:a="http://schemas.openxmlformats.org/drawingml/2006/main" xmlns:r="http://schemas.openxmlformats.org/officeDocument/2006/relationships" xmlns:p="http://schemas.openxmlformats.org/presentationml/2006/main">
   <p:cSld>
     <p:spTree>
@@ -4522,7 +4711,7 @@
 </p:sld>
 </file>
 
-<file path=ppt/slides/slide14.xml><?xml version="1.0" encoding="utf-8"?>
+<file path=ppt/slides/slide15.xml><?xml version="1.0" encoding="utf-8"?>
 <p:sld xmlns:a="http://schemas.openxmlformats.org/drawingml/2006/main" xmlns:r="http://schemas.openxmlformats.org/officeDocument/2006/relationships" xmlns:p="http://schemas.openxmlformats.org/presentationml/2006/main">
   <p:cSld>
     <p:spTree>
@@ -5118,6 +5307,17 @@
             </a:r>
             <a:endParaRPr lang="nl-NL" dirty="0"/>
           </a:p>
+          <a:p>
+            <a:pPr lvl="1"/>
+            <a:endParaRPr lang="nl-NL" dirty="0"/>
+          </a:p>
+          <a:p>
+            <a:pPr lvl="1"/>
+            <a:r>
+              <a:rPr lang="nl-NL" dirty="0"/>
+              <a:t>LET OP</a:t>
+            </a:r>
+          </a:p>
         </p:txBody>
       </p:sp>
       <p:pic>
@@ -5171,6 +5371,153 @@
         <p:cNvPr id="1" name="">
           <a:extLst>
             <a:ext uri="{FF2B5EF4-FFF2-40B4-BE49-F238E27FC236}">
+              <a16:creationId xmlns:a16="http://schemas.microsoft.com/office/drawing/2014/main" id="{9CAB7802-95C4-B611-3F8A-84C9EC65BC7D}"/>
+            </a:ext>
+          </a:extLst>
+        </p:cNvPr>
+        <p:cNvGrpSpPr/>
+        <p:nvPr/>
+      </p:nvGrpSpPr>
+      <p:grpSpPr>
+        <a:xfrm>
+          <a:off x="0" y="0"/>
+          <a:ext cx="0" cy="0"/>
+          <a:chOff x="0" y="0"/>
+          <a:chExt cx="0" cy="0"/>
+        </a:xfrm>
+      </p:grpSpPr>
+      <p:sp>
+        <p:nvSpPr>
+          <p:cNvPr id="2" name="Title 1">
+            <a:extLst>
+              <a:ext uri="{FF2B5EF4-FFF2-40B4-BE49-F238E27FC236}">
+                <a16:creationId xmlns:a16="http://schemas.microsoft.com/office/drawing/2014/main" id="{40A7B55D-529C-13A7-E740-2FAB3FEE61DC}"/>
+              </a:ext>
+            </a:extLst>
+          </p:cNvPr>
+          <p:cNvSpPr>
+            <a:spLocks noGrp="1"/>
+          </p:cNvSpPr>
+          <p:nvPr>
+            <p:ph type="title"/>
+          </p:nvPr>
+        </p:nvSpPr>
+        <p:spPr/>
+        <p:txBody>
+          <a:bodyPr/>
+          <a:lstStyle/>
+          <a:p>
+            <a:r>
+              <a:rPr lang="nl-NL" dirty="0"/>
+              <a:t>Composer </a:t>
+            </a:r>
+            <a:r>
+              <a:rPr lang="nl-NL" dirty="0" err="1"/>
+              <a:t>install</a:t>
+            </a:r>
+            <a:r>
+              <a:rPr lang="nl-NL" dirty="0"/>
+              <a:t> GOTCHA</a:t>
+            </a:r>
+          </a:p>
+        </p:txBody>
+      </p:sp>
+      <p:sp>
+        <p:nvSpPr>
+          <p:cNvPr id="3" name="Content Placeholder 2">
+            <a:extLst>
+              <a:ext uri="{FF2B5EF4-FFF2-40B4-BE49-F238E27FC236}">
+                <a16:creationId xmlns:a16="http://schemas.microsoft.com/office/drawing/2014/main" id="{D05685E2-71C0-EBAF-231E-B159B81562D5}"/>
+              </a:ext>
+            </a:extLst>
+          </p:cNvPr>
+          <p:cNvSpPr>
+            <a:spLocks noGrp="1"/>
+          </p:cNvSpPr>
+          <p:nvPr>
+            <p:ph idx="1"/>
+          </p:nvPr>
+        </p:nvSpPr>
+        <p:spPr>
+          <a:xfrm>
+            <a:off x="838200" y="1825625"/>
+            <a:ext cx="10741182" cy="4351338"/>
+          </a:xfrm>
+        </p:spPr>
+        <p:txBody>
+          <a:bodyPr/>
+          <a:lstStyle/>
+          <a:p>
+            <a:pPr lvl="1"/>
+            <a:r>
+              <a:rPr lang="nl-NL" dirty="0"/>
+              <a:t>LET OP:</a:t>
+            </a:r>
+          </a:p>
+          <a:p>
+            <a:pPr lvl="2"/>
+            <a:r>
+              <a:rPr lang="nl-NL" dirty="0"/>
+              <a:t>Als de composer </a:t>
+            </a:r>
+            <a:r>
+              <a:rPr lang="nl-NL" dirty="0" err="1"/>
+              <a:t>installer</a:t>
+            </a:r>
+            <a:r>
+              <a:rPr lang="nl-NL" dirty="0"/>
+              <a:t> niet werkt (SSL error/download </a:t>
+            </a:r>
+            <a:r>
+              <a:rPr lang="nl-NL" dirty="0" err="1"/>
+              <a:t>erro</a:t>
+            </a:r>
+            <a:r>
+              <a:rPr lang="nl-NL" dirty="0"/>
+              <a:t>)</a:t>
+            </a:r>
+          </a:p>
+          <a:p>
+            <a:pPr lvl="2"/>
+            <a:r>
+              <a:rPr lang="nl-NL" dirty="0"/>
+              <a:t>Zet even je virus scanner/web beveiliging uit</a:t>
+            </a:r>
+          </a:p>
+          <a:p>
+            <a:pPr lvl="2"/>
+            <a:r>
+              <a:rPr lang="nl-NL" dirty="0" err="1"/>
+              <a:t>Avast</a:t>
+            </a:r>
+            <a:r>
+              <a:rPr lang="nl-NL" dirty="0"/>
+              <a:t> bijvoorbeeld</a:t>
+            </a:r>
+          </a:p>
+        </p:txBody>
+      </p:sp>
+    </p:spTree>
+    <p:extLst>
+      <p:ext uri="{BB962C8B-B14F-4D97-AF65-F5344CB8AC3E}">
+        <p14:creationId xmlns:p14="http://schemas.microsoft.com/office/powerpoint/2010/main" val="3784629920"/>
+      </p:ext>
+    </p:extLst>
+  </p:cSld>
+  <p:clrMapOvr>
+    <a:masterClrMapping/>
+  </p:clrMapOvr>
+</p:sld>
+</file>
+
+<file path=ppt/slides/slide6.xml><?xml version="1.0" encoding="utf-8"?>
+<p:sld xmlns:a="http://schemas.openxmlformats.org/drawingml/2006/main" xmlns:r="http://schemas.openxmlformats.org/officeDocument/2006/relationships" xmlns:p="http://schemas.openxmlformats.org/presentationml/2006/main">
+  <p:cSld>
+    <p:spTree>
+      <p:nvGrpSpPr>
+        <p:cNvPr id="1" name="">
+          <a:extLst>
+            <a:ext uri="{FF2B5EF4-FFF2-40B4-BE49-F238E27FC236}">
               <a16:creationId xmlns:a16="http://schemas.microsoft.com/office/drawing/2014/main" id="{5A40C60C-5416-6983-D1D5-70D700928BA6}"/>
             </a:ext>
           </a:extLst>
@@ -5290,7 +5637,7 @@
 </p:sld>
 </file>
 
-<file path=ppt/slides/slide6.xml><?xml version="1.0" encoding="utf-8"?>
+<file path=ppt/slides/slide7.xml><?xml version="1.0" encoding="utf-8"?>
 <p:sld xmlns:a="http://schemas.openxmlformats.org/drawingml/2006/main" xmlns:r="http://schemas.openxmlformats.org/officeDocument/2006/relationships" xmlns:p="http://schemas.openxmlformats.org/presentationml/2006/main">
   <p:cSld>
     <p:spTree>
@@ -5506,7 +5853,7 @@
 </p:sld>
 </file>
 
-<file path=ppt/slides/slide7.xml><?xml version="1.0" encoding="utf-8"?>
+<file path=ppt/slides/slide8.xml><?xml version="1.0" encoding="utf-8"?>
 <p:sld xmlns:a="http://schemas.openxmlformats.org/drawingml/2006/main" xmlns:r="http://schemas.openxmlformats.org/officeDocument/2006/relationships" xmlns:p="http://schemas.openxmlformats.org/presentationml/2006/main">
   <p:cSld>
     <p:spTree>
@@ -5688,7 +6035,7 @@
 </p:sld>
 </file>
 
-<file path=ppt/slides/slide8.xml><?xml version="1.0" encoding="utf-8"?>
+<file path=ppt/slides/slide9.xml><?xml version="1.0" encoding="utf-8"?>
 <p:sld xmlns:a="http://schemas.openxmlformats.org/drawingml/2006/main" xmlns:r="http://schemas.openxmlformats.org/officeDocument/2006/relationships" xmlns:p="http://schemas.openxmlformats.org/presentationml/2006/main">
   <p:cSld>
     <p:spTree>
@@ -5745,170 +6092,6 @@
     <p:extLst>
       <p:ext uri="{BB962C8B-B14F-4D97-AF65-F5344CB8AC3E}">
         <p14:creationId xmlns:p14="http://schemas.microsoft.com/office/powerpoint/2010/main" val="780809917"/>
-      </p:ext>
-    </p:extLst>
-  </p:cSld>
-  <p:clrMapOvr>
-    <a:masterClrMapping/>
-  </p:clrMapOvr>
-</p:sld>
-</file>
-
-<file path=ppt/slides/slide9.xml><?xml version="1.0" encoding="utf-8"?>
-<p:sld xmlns:a="http://schemas.openxmlformats.org/drawingml/2006/main" xmlns:r="http://schemas.openxmlformats.org/officeDocument/2006/relationships" xmlns:p="http://schemas.openxmlformats.org/presentationml/2006/main">
-  <p:cSld>
-    <p:spTree>
-      <p:nvGrpSpPr>
-        <p:cNvPr id="1" name="">
-          <a:extLst>
-            <a:ext uri="{FF2B5EF4-FFF2-40B4-BE49-F238E27FC236}">
-              <a16:creationId xmlns:a16="http://schemas.microsoft.com/office/drawing/2014/main" id="{2EAACB33-43BE-EDF1-1A9E-034E28C6C768}"/>
-            </a:ext>
-          </a:extLst>
-        </p:cNvPr>
-        <p:cNvGrpSpPr/>
-        <p:nvPr/>
-      </p:nvGrpSpPr>
-      <p:grpSpPr>
-        <a:xfrm>
-          <a:off x="0" y="0"/>
-          <a:ext cx="0" cy="0"/>
-          <a:chOff x="0" y="0"/>
-          <a:chExt cx="0" cy="0"/>
-        </a:xfrm>
-      </p:grpSpPr>
-      <p:sp>
-        <p:nvSpPr>
-          <p:cNvPr id="2" name="Title 1">
-            <a:extLst>
-              <a:ext uri="{FF2B5EF4-FFF2-40B4-BE49-F238E27FC236}">
-                <a16:creationId xmlns:a16="http://schemas.microsoft.com/office/drawing/2014/main" id="{79ACB165-A2D9-F103-EA6F-93584CC5166C}"/>
-              </a:ext>
-            </a:extLst>
-          </p:cNvPr>
-          <p:cNvSpPr>
-            <a:spLocks noGrp="1"/>
-          </p:cNvSpPr>
-          <p:nvPr>
-            <p:ph type="title"/>
-          </p:nvPr>
-        </p:nvSpPr>
-        <p:spPr/>
-        <p:txBody>
-          <a:bodyPr/>
-          <a:lstStyle/>
-          <a:p>
-            <a:r>
-              <a:rPr lang="nl-NL" dirty="0"/>
-              <a:t>@@@@@@</a:t>
-            </a:r>
-          </a:p>
-        </p:txBody>
-      </p:sp>
-      <p:sp>
-        <p:nvSpPr>
-          <p:cNvPr id="3" name="Content Placeholder 2">
-            <a:extLst>
-              <a:ext uri="{FF2B5EF4-FFF2-40B4-BE49-F238E27FC236}">
-                <a16:creationId xmlns:a16="http://schemas.microsoft.com/office/drawing/2014/main" id="{18E7F1CB-60BD-BCA2-61ED-D714D805A39C}"/>
-              </a:ext>
-            </a:extLst>
-          </p:cNvPr>
-          <p:cNvSpPr>
-            <a:spLocks noGrp="1"/>
-          </p:cNvSpPr>
-          <p:nvPr>
-            <p:ph idx="1"/>
-          </p:nvPr>
-        </p:nvSpPr>
-        <p:spPr/>
-        <p:txBody>
-          <a:bodyPr>
-            <a:normAutofit/>
-          </a:bodyPr>
-          <a:lstStyle/>
-          <a:p>
-            <a:r>
-              <a:rPr lang="nl-NL" dirty="0"/>
-              <a:t>In de </a:t>
-            </a:r>
-            <a:r>
-              <a:rPr lang="nl-NL" dirty="0" err="1"/>
-              <a:t>blade</a:t>
-            </a:r>
-            <a:r>
-              <a:rPr lang="nl-NL" dirty="0"/>
-              <a:t> zie je veel @for @if </a:t>
-            </a:r>
-            <a:r>
-              <a:rPr lang="nl-NL" dirty="0" err="1"/>
-              <a:t>etc</a:t>
-            </a:r>
-            <a:endParaRPr lang="nl-NL" dirty="0"/>
-          </a:p>
-          <a:p>
-            <a:endParaRPr lang="nl-NL" dirty="0"/>
-          </a:p>
-          <a:p>
-            <a:r>
-              <a:rPr lang="nl-NL" dirty="0"/>
-              <a:t>Dit wordt gewoon een &lt;?</a:t>
-            </a:r>
-            <a:r>
-              <a:rPr lang="nl-NL" dirty="0" err="1"/>
-              <a:t>php</a:t>
-            </a:r>
-            <a:r>
-              <a:rPr lang="nl-NL" dirty="0"/>
-              <a:t> </a:t>
-            </a:r>
-            <a:r>
-              <a:rPr lang="nl-NL" dirty="0" err="1"/>
-              <a:t>for</a:t>
-            </a:r>
-            <a:r>
-              <a:rPr lang="nl-NL" dirty="0"/>
-              <a:t>….</a:t>
-            </a:r>
-          </a:p>
-          <a:p>
-            <a:endParaRPr lang="nl-NL" dirty="0"/>
-          </a:p>
-          <a:p>
-            <a:r>
-              <a:rPr lang="nl-NL" dirty="0"/>
-              <a:t>Maar is:</a:t>
-            </a:r>
-          </a:p>
-          <a:p>
-            <a:pPr lvl="1"/>
-            <a:r>
-              <a:rPr lang="nl-NL" dirty="0"/>
-              <a:t>snelle typen</a:t>
-            </a:r>
-          </a:p>
-          <a:p>
-            <a:pPr lvl="1"/>
-            <a:r>
-              <a:rPr lang="nl-NL" dirty="0"/>
-              <a:t>cleaner om te zien</a:t>
-            </a:r>
-          </a:p>
-          <a:p>
-            <a:endParaRPr lang="nl-NL" dirty="0"/>
-          </a:p>
-          <a:p>
-            <a:r>
-              <a:rPr lang="nl-NL" dirty="0"/>
-              <a:t>Syntax Sugar ^^</a:t>
-            </a:r>
-          </a:p>
-        </p:txBody>
-      </p:sp>
-    </p:spTree>
-    <p:extLst>
-      <p:ext uri="{BB962C8B-B14F-4D97-AF65-F5344CB8AC3E}">
-        <p14:creationId xmlns:p14="http://schemas.microsoft.com/office/powerpoint/2010/main" val="218540331"/>
       </p:ext>
     </p:extLst>
   </p:cSld>
